--- a/WebTechnology/Notes/6serverSideScriptingUsingPHP.pptx
+++ b/WebTechnology/Notes/6serverSideScriptingUsingPHP.pptx
@@ -239,6 +239,13 @@
             <a:schemeClr val="lt1"/>
           </a:fontRef>
         </p:style>
+        <p:txBody>
+          <a:bodyPr/>
+          <a:lstStyle/>
+          <a:p>
+            <a:endParaRPr lang="en-US"/>
+          </a:p>
+        </p:txBody>
       </p:sp>
       <p:sp>
         <p:nvSpPr>
@@ -277,6 +284,13 @@
             <a:schemeClr val="lt1"/>
           </a:fontRef>
         </p:style>
+        <p:txBody>
+          <a:bodyPr/>
+          <a:lstStyle/>
+          <a:p>
+            <a:endParaRPr lang="en-US"/>
+          </a:p>
+        </p:txBody>
       </p:sp>
       <p:sp>
         <p:nvSpPr>
@@ -410,7 +424,7 @@
           <a:p>
             <a:fld id="{FA5BF02E-3B57-4BB0-9DA7-41BFDA56EF6C}" type="datetimeFigureOut">
               <a:rPr lang="en-US" smtClean="0"/>
-              <a:t>3/25/2025</a:t>
+              <a:t>2/26/2026</a:t>
             </a:fld>
             <a:endParaRPr lang="en-US" dirty="0"/>
           </a:p>
@@ -618,7 +632,7 @@
           <a:p>
             <a:fld id="{FA5BF02E-3B57-4BB0-9DA7-41BFDA56EF6C}" type="datetimeFigureOut">
               <a:rPr lang="en-US" smtClean="0"/>
-              <a:t>3/25/2025</a:t>
+              <a:t>2/26/2026</a:t>
             </a:fld>
             <a:endParaRPr lang="en-US" dirty="0"/>
           </a:p>
@@ -874,7 +888,7 @@
           <a:p>
             <a:fld id="{FA5BF02E-3B57-4BB0-9DA7-41BFDA56EF6C}" type="datetimeFigureOut">
               <a:rPr lang="en-US" smtClean="0"/>
-              <a:t>3/25/2025</a:t>
+              <a:t>2/26/2026</a:t>
             </a:fld>
             <a:endParaRPr lang="en-US" dirty="0"/>
           </a:p>
@@ -1043,7 +1057,7 @@
           <a:p>
             <a:fld id="{FA5BF02E-3B57-4BB0-9DA7-41BFDA56EF6C}" type="datetimeFigureOut">
               <a:rPr lang="en-US" smtClean="0"/>
-              <a:t>3/25/2025</a:t>
+              <a:t>2/26/2026</a:t>
             </a:fld>
             <a:endParaRPr lang="en-US" dirty="0"/>
           </a:p>
@@ -1422,7 +1436,7 @@
           <a:p>
             <a:fld id="{FA5BF02E-3B57-4BB0-9DA7-41BFDA56EF6C}" type="datetimeFigureOut">
               <a:rPr lang="en-US" smtClean="0"/>
-              <a:t>3/25/2025</a:t>
+              <a:t>2/26/2026</a:t>
             </a:fld>
             <a:endParaRPr lang="en-US" dirty="0"/>
           </a:p>
@@ -1697,7 +1711,7 @@
           <a:p>
             <a:fld id="{FA5BF02E-3B57-4BB0-9DA7-41BFDA56EF6C}" type="datetimeFigureOut">
               <a:rPr lang="en-US" smtClean="0"/>
-              <a:t>3/25/2025</a:t>
+              <a:t>2/26/2026</a:t>
             </a:fld>
             <a:endParaRPr lang="en-US" dirty="0"/>
           </a:p>
@@ -2076,7 +2090,7 @@
           <a:p>
             <a:fld id="{FA5BF02E-3B57-4BB0-9DA7-41BFDA56EF6C}" type="datetimeFigureOut">
               <a:rPr lang="en-US" smtClean="0"/>
-              <a:t>3/25/2025</a:t>
+              <a:t>2/26/2026</a:t>
             </a:fld>
             <a:endParaRPr lang="en-US" dirty="0"/>
           </a:p>
@@ -2194,7 +2208,7 @@
           <a:p>
             <a:fld id="{FA5BF02E-3B57-4BB0-9DA7-41BFDA56EF6C}" type="datetimeFigureOut">
               <a:rPr lang="en-US" smtClean="0"/>
-              <a:t>3/25/2025</a:t>
+              <a:t>2/26/2026</a:t>
             </a:fld>
             <a:endParaRPr lang="en-US" dirty="0"/>
           </a:p>
@@ -2365,7 +2379,7 @@
           <a:p>
             <a:fld id="{FA5BF02E-3B57-4BB0-9DA7-41BFDA56EF6C}" type="datetimeFigureOut">
               <a:rPr lang="en-US" smtClean="0"/>
-              <a:t>3/25/2025</a:t>
+              <a:t>2/26/2026</a:t>
             </a:fld>
             <a:endParaRPr lang="en-US" dirty="0"/>
           </a:p>
@@ -2719,7 +2733,7 @@
           <a:p>
             <a:fld id="{FA5BF02E-3B57-4BB0-9DA7-41BFDA56EF6C}" type="datetimeFigureOut">
               <a:rPr lang="en-US" smtClean="0"/>
-              <a:t>3/25/2025</a:t>
+              <a:t>2/26/2026</a:t>
             </a:fld>
             <a:endParaRPr lang="en-US" dirty="0"/>
           </a:p>
@@ -3095,7 +3109,7 @@
           <a:p>
             <a:fld id="{FA5BF02E-3B57-4BB0-9DA7-41BFDA56EF6C}" type="datetimeFigureOut">
               <a:rPr lang="en-US" smtClean="0"/>
-              <a:t>3/25/2025</a:t>
+              <a:t>2/26/2026</a:t>
             </a:fld>
             <a:endParaRPr lang="en-US" dirty="0"/>
           </a:p>
@@ -3215,6 +3229,13 @@
             <a:schemeClr val="lt1"/>
           </a:fontRef>
         </p:style>
+        <p:txBody>
+          <a:bodyPr/>
+          <a:lstStyle/>
+          <a:p>
+            <a:endParaRPr lang="en-US"/>
+          </a:p>
+        </p:txBody>
       </p:sp>
       <p:sp>
         <p:nvSpPr>
@@ -3253,6 +3274,13 @@
             <a:schemeClr val="lt1"/>
           </a:fontRef>
         </p:style>
+        <p:txBody>
+          <a:bodyPr/>
+          <a:lstStyle/>
+          <a:p>
+            <a:endParaRPr lang="en-US"/>
+          </a:p>
+        </p:txBody>
       </p:sp>
       <p:sp>
         <p:nvSpPr>
@@ -3382,7 +3410,7 @@
           <a:p>
             <a:fld id="{FA5BF02E-3B57-4BB0-9DA7-41BFDA56EF6C}" type="datetimeFigureOut">
               <a:rPr lang="en-US" smtClean="0"/>
-              <a:t>3/25/2025</a:t>
+              <a:t>2/26/2026</a:t>
             </a:fld>
             <a:endParaRPr lang="en-US" dirty="0"/>
           </a:p>
